--- a/01 - documentation and preparation/02 - SQL Server Clustered Index - Nonclustered Index - Heap - db Berater GmbH.pptx
+++ b/01 - documentation and preparation/02 - SQL Server Clustered Index - Nonclustered Index - Heap - db Berater GmbH.pptx
@@ -178,10 +178,25 @@
   <pc:docChgLst>
     <pc:chgData name="Uwe Ricken" userId="f02567aecbed924b" providerId="LiveId" clId="{E77B627B-1F43-41A9-9F24-D4BB31BF6050}"/>
     <pc:docChg chg="custSel addSld delSld modSld delMainMaster modMainMaster">
-      <pc:chgData name="Uwe Ricken" userId="f02567aecbed924b" providerId="LiveId" clId="{E77B627B-1F43-41A9-9F24-D4BB31BF6050}" dt="2026-04-07T16:41:48.616" v="72" actId="20577"/>
+      <pc:chgData name="Uwe Ricken" userId="f02567aecbed924b" providerId="LiveId" clId="{E77B627B-1F43-41A9-9F24-D4BB31BF6050}" dt="2026-04-09T04:29:42.260" v="74" actId="6549"/>
       <pc:docMkLst>
         <pc:docMk/>
       </pc:docMkLst>
+      <pc:sldChg chg="modSp mod">
+        <pc:chgData name="Uwe Ricken" userId="f02567aecbed924b" providerId="LiveId" clId="{E77B627B-1F43-41A9-9F24-D4BB31BF6050}" dt="2026-04-09T04:29:42.260" v="74" actId="6549"/>
+        <pc:sldMkLst>
+          <pc:docMk/>
+          <pc:sldMk cId="1614993614" sldId="256"/>
+        </pc:sldMkLst>
+        <pc:spChg chg="mod">
+          <ac:chgData name="Uwe Ricken" userId="f02567aecbed924b" providerId="LiveId" clId="{E77B627B-1F43-41A9-9F24-D4BB31BF6050}" dt="2026-04-09T04:29:42.260" v="74" actId="6549"/>
+          <ac:spMkLst>
+            <pc:docMk/>
+            <pc:sldMk cId="1614993614" sldId="256"/>
+            <ac:spMk id="3" creationId="{00000000-0000-0000-0000-000000000000}"/>
+          </ac:spMkLst>
+        </pc:spChg>
+      </pc:sldChg>
       <pc:sldChg chg="modSp mod">
         <pc:chgData name="Uwe Ricken" userId="f02567aecbed924b" providerId="LiveId" clId="{E77B627B-1F43-41A9-9F24-D4BB31BF6050}" dt="2026-04-07T16:41:19.834" v="39" actId="20577"/>
         <pc:sldMkLst>
@@ -314,7 +329,7 @@
           <a:p>
             <a:fld id="{32C73415-10F7-418B-9CE5-4D962F0C15FB}" type="datetimeFigureOut">
               <a:rPr lang="de-DE" smtClean="0"/>
-              <a:t>07.04.2026</a:t>
+              <a:t>09.04.2026</a:t>
             </a:fld>
             <a:endParaRPr lang="de-DE"/>
           </a:p>
@@ -3017,25 +3032,12 @@
           <a:lstStyle/>
           <a:p>
             <a:r>
-              <a:rPr lang="en-US" dirty="0"/>
-              <a:t>Index Analysis and Performance Improvement</a:t>
+              <a:rPr lang="de-DE"/>
+              <a:t>Heap </a:t>
             </a:r>
             <a:r>
               <a:rPr lang="de-DE" dirty="0"/>
-              <a:t> </a:t>
-            </a:r>
-            <a:br>
-              <a:rPr lang="de-DE" dirty="0"/>
-            </a:br>
-            <a:endParaRPr lang="de-DE" dirty="0"/>
-          </a:p>
-          <a:p>
-            <a:br>
-              <a:rPr lang="de-DE" dirty="0"/>
-            </a:br>
-            <a:r>
-              <a:rPr lang="de-DE" dirty="0"/>
-              <a:t>Heap - Clustered Index – Non Clustered Index</a:t>
+              <a:t>- Clustered Index – Non Clustered Index</a:t>
             </a:r>
             <a:br>
               <a:rPr lang="de-DE" dirty="0"/>
